--- a/GenAI/wk4-embedding-vectorDB-SemanticSearch/x_llamaindex/1_project_RAG_chatbot_using_llamaindex/notes.pptx
+++ b/GenAI/wk4-embedding-vectorDB-SemanticSearch/x_llamaindex/1_project_RAG_chatbot_using_llamaindex/notes.pptx
@@ -227,7 +227,7 @@
           <a:p>
             <a:fld id="{7BAEECA8-D063-486F-AE31-5020270C1449}" type="datetimeFigureOut">
               <a:rPr lang="en-US" smtClean="0"/>
-              <a:t>6/3/2026</a:t>
+              <a:t>6/15/2026</a:t>
             </a:fld>
             <a:endParaRPr lang="en-US"/>
           </a:p>
@@ -1656,7 +1656,7 @@
           <a:p>
             <a:fld id="{CB233BD1-3BA8-448D-9D08-7846095EA517}" type="datetimeFigureOut">
               <a:rPr lang="en-US" smtClean="0"/>
-              <a:t>6/3/2026</a:t>
+              <a:t>6/15/2026</a:t>
             </a:fld>
             <a:endParaRPr lang="en-US"/>
           </a:p>
@@ -2070,7 +2070,7 @@
           <a:p>
             <a:fld id="{6383FAE1-13DE-4511-8C1B-C8AFB720664C}" type="datetimeFigureOut">
               <a:rPr lang="en-US" smtClean="0"/>
-              <a:t>6/3/2026</a:t>
+              <a:t>6/15/2026</a:t>
             </a:fld>
             <a:endParaRPr lang="en-US"/>
           </a:p>
@@ -2268,7 +2268,7 @@
           <a:p>
             <a:fld id="{6383FAE1-13DE-4511-8C1B-C8AFB720664C}" type="datetimeFigureOut">
               <a:rPr lang="en-US" smtClean="0"/>
-              <a:t>6/3/2026</a:t>
+              <a:t>6/15/2026</a:t>
             </a:fld>
             <a:endParaRPr lang="en-US"/>
           </a:p>
@@ -2476,7 +2476,7 @@
           <a:p>
             <a:fld id="{6383FAE1-13DE-4511-8C1B-C8AFB720664C}" type="datetimeFigureOut">
               <a:rPr lang="en-US" smtClean="0"/>
-              <a:t>6/3/2026</a:t>
+              <a:t>6/15/2026</a:t>
             </a:fld>
             <a:endParaRPr lang="en-US"/>
           </a:p>
@@ -2674,7 +2674,7 @@
           <a:p>
             <a:fld id="{6383FAE1-13DE-4511-8C1B-C8AFB720664C}" type="datetimeFigureOut">
               <a:rPr lang="en-US" smtClean="0"/>
-              <a:t>6/3/2026</a:t>
+              <a:t>6/15/2026</a:t>
             </a:fld>
             <a:endParaRPr lang="en-US"/>
           </a:p>
@@ -2949,7 +2949,7 @@
           <a:p>
             <a:fld id="{6383FAE1-13DE-4511-8C1B-C8AFB720664C}" type="datetimeFigureOut">
               <a:rPr lang="en-US" smtClean="0"/>
-              <a:t>6/3/2026</a:t>
+              <a:t>6/15/2026</a:t>
             </a:fld>
             <a:endParaRPr lang="en-US"/>
           </a:p>
@@ -3214,7 +3214,7 @@
           <a:p>
             <a:fld id="{6383FAE1-13DE-4511-8C1B-C8AFB720664C}" type="datetimeFigureOut">
               <a:rPr lang="en-US" smtClean="0"/>
-              <a:t>6/3/2026</a:t>
+              <a:t>6/15/2026</a:t>
             </a:fld>
             <a:endParaRPr lang="en-US"/>
           </a:p>
@@ -3626,7 +3626,7 @@
           <a:p>
             <a:fld id="{6383FAE1-13DE-4511-8C1B-C8AFB720664C}" type="datetimeFigureOut">
               <a:rPr lang="en-US" smtClean="0"/>
-              <a:t>6/3/2026</a:t>
+              <a:t>6/15/2026</a:t>
             </a:fld>
             <a:endParaRPr lang="en-US"/>
           </a:p>
@@ -3767,7 +3767,7 @@
           <a:p>
             <a:fld id="{6383FAE1-13DE-4511-8C1B-C8AFB720664C}" type="datetimeFigureOut">
               <a:rPr lang="en-US" smtClean="0"/>
-              <a:t>6/3/2026</a:t>
+              <a:t>6/15/2026</a:t>
             </a:fld>
             <a:endParaRPr lang="en-US"/>
           </a:p>
@@ -3880,7 +3880,7 @@
           <a:p>
             <a:fld id="{6383FAE1-13DE-4511-8C1B-C8AFB720664C}" type="datetimeFigureOut">
               <a:rPr lang="en-US" smtClean="0"/>
-              <a:t>6/3/2026</a:t>
+              <a:t>6/15/2026</a:t>
             </a:fld>
             <a:endParaRPr lang="en-US"/>
           </a:p>
@@ -4191,7 +4191,7 @@
           <a:p>
             <a:fld id="{6383FAE1-13DE-4511-8C1B-C8AFB720664C}" type="datetimeFigureOut">
               <a:rPr lang="en-US" smtClean="0"/>
-              <a:t>6/3/2026</a:t>
+              <a:t>6/15/2026</a:t>
             </a:fld>
             <a:endParaRPr lang="en-US"/>
           </a:p>
@@ -4482,7 +4482,7 @@
           <a:p>
             <a:fld id="{6383FAE1-13DE-4511-8C1B-C8AFB720664C}" type="datetimeFigureOut">
               <a:rPr lang="en-US" smtClean="0"/>
-              <a:t>6/3/2026</a:t>
+              <a:t>6/15/2026</a:t>
             </a:fld>
             <a:endParaRPr lang="en-US"/>
           </a:p>
@@ -4726,7 +4726,7 @@
           <a:p>
             <a:fld id="{6383FAE1-13DE-4511-8C1B-C8AFB720664C}" type="datetimeFigureOut">
               <a:rPr lang="en-US" smtClean="0"/>
-              <a:t>6/3/2026</a:t>
+              <a:t>6/15/2026</a:t>
             </a:fld>
             <a:endParaRPr lang="en-US"/>
           </a:p>
@@ -5813,29 +5813,7 @@
                   </a:schemeClr>
                 </a:solidFill>
               </a:rPr>
-              <a:t>3)   Analyze </a:t>
-            </a:r>
-            <a:r>
-              <a:rPr lang="en-US" sz="2400" dirty="0" err="1">
-                <a:solidFill>
-                  <a:schemeClr val="accent6">
-                    <a:lumMod val="60000"/>
-                    <a:lumOff val="40000"/>
-                  </a:schemeClr>
-                </a:solidFill>
-              </a:rPr>
-              <a:t>BlueHoney</a:t>
-            </a:r>
-            <a:r>
-              <a:rPr lang="en-US" sz="2400" dirty="0">
-                <a:solidFill>
-                  <a:schemeClr val="accent6">
-                    <a:lumMod val="60000"/>
-                    <a:lumOff val="40000"/>
-                  </a:schemeClr>
-                </a:solidFill>
-              </a:rPr>
-              <a:t> Academy's financial health using liquidity, profitability, and leverage ratios.</a:t>
+              <a:t>3)   Analyze BlueHoney Academy's financial health using liquidity, profitability, and leverage ratios.</a:t>
             </a:r>
           </a:p>
         </p:txBody>
@@ -6024,29 +6002,7 @@
                   </a:schemeClr>
                 </a:solidFill>
               </a:rPr>
-              <a:t>6)  How much additional revenue would </a:t>
-            </a:r>
-            <a:r>
-              <a:rPr lang="en-US" sz="2400" dirty="0" err="1">
-                <a:solidFill>
-                  <a:schemeClr val="accent6">
-                    <a:lumMod val="60000"/>
-                    <a:lumOff val="40000"/>
-                  </a:schemeClr>
-                </a:solidFill>
-              </a:rPr>
-              <a:t>BlueHoney</a:t>
-            </a:r>
-            <a:r>
-              <a:rPr lang="en-US" sz="2400" dirty="0">
-                <a:solidFill>
-                  <a:schemeClr val="accent6">
-                    <a:lumMod val="60000"/>
-                    <a:lumOff val="40000"/>
-                  </a:schemeClr>
-                </a:solidFill>
-              </a:rPr>
-              <a:t> Academy need to generate to achieve a net profit of ₹30 million if the net profit margin remains unchanged?"</a:t>
+              <a:t>6)  How much additional revenue would BlueHoney Academy need to generate to achieve a net profit of ₹30 million if the net profit margin remains unchanged?"</a:t>
             </a:r>
           </a:p>
         </p:txBody>
@@ -7470,7 +7426,7 @@
           </a:p>
           <a:p>
             <a:r>
-              <a:rPr lang="en-US" sz="2400">
+              <a:rPr lang="en-US" sz="2400" dirty="0">
                 <a:solidFill>
                   <a:schemeClr val="accent6">
                     <a:lumMod val="60000"/>
@@ -7480,14 +7436,6 @@
               </a:rPr>
               <a:t>llama-index==0.14.21</a:t>
             </a:r>
-            <a:endParaRPr lang="en-US" sz="2400" dirty="0">
-              <a:solidFill>
-                <a:schemeClr val="accent6">
-                  <a:lumMod val="60000"/>
-                  <a:lumOff val="40000"/>
-                </a:schemeClr>
-              </a:solidFill>
-            </a:endParaRPr>
           </a:p>
         </p:txBody>
       </p:sp>
@@ -9719,29 +9667,7 @@
                   </a:schemeClr>
                 </a:solidFill>
               </a:rPr>
-              <a:t> the </a:t>
-            </a:r>
-            <a:r>
-              <a:rPr lang="en-US" sz="2400" dirty="0" err="1">
-                <a:solidFill>
-                  <a:schemeClr val="accent6">
-                    <a:lumMod val="60000"/>
-                    <a:lumOff val="40000"/>
-                  </a:schemeClr>
-                </a:solidFill>
-              </a:rPr>
-              <a:t>BlueHoney</a:t>
-            </a:r>
-            <a:r>
-              <a:rPr lang="en-US" sz="2400" dirty="0">
-                <a:solidFill>
-                  <a:schemeClr val="accent6">
-                    <a:lumMod val="60000"/>
-                    <a:lumOff val="40000"/>
-                  </a:schemeClr>
-                </a:solidFill>
-              </a:rPr>
-              <a:t> Academy Financial PDF documents and </a:t>
+              <a:t> the BlueHoney Academy Financial PDF documents and </a:t>
             </a:r>
             <a:r>
               <a:rPr lang="en-US" sz="2400" b="1" u="sng" dirty="0">
@@ -9854,29 +9780,7 @@
                   </a:schemeClr>
                 </a:solidFill>
               </a:rPr>
-              <a:t>What percentage of </a:t>
-            </a:r>
-            <a:r>
-              <a:rPr lang="en-US" sz="2400" dirty="0" err="1">
-                <a:solidFill>
-                  <a:schemeClr val="accent6">
-                    <a:lumMod val="60000"/>
-                    <a:lumOff val="40000"/>
-                  </a:schemeClr>
-                </a:solidFill>
-              </a:rPr>
-              <a:t>BlueHoney</a:t>
-            </a:r>
-            <a:r>
-              <a:rPr lang="en-US" sz="2400" dirty="0">
-                <a:solidFill>
-                  <a:schemeClr val="accent6">
-                    <a:lumMod val="60000"/>
-                    <a:lumOff val="40000"/>
-                  </a:schemeClr>
-                </a:solidFill>
-              </a:rPr>
-              <a:t> Academy's revenue comes from non-course sales, and what does that imply about revenue diversification?</a:t>
+              <a:t>What percentage of BlueHoney Academy's revenue comes from non-course sales, and what does that imply about revenue diversification?</a:t>
             </a:r>
           </a:p>
         </p:txBody>
@@ -10160,29 +10064,7 @@
                       </a:schemeClr>
                     </a:solidFill>
                   </a:rPr>
-                  <a:t>55% of </a:t>
-                </a:r>
-                <a:r>
-                  <a:rPr lang="en-US" dirty="0" err="1">
-                    <a:solidFill>
-                      <a:schemeClr val="accent6">
-                        <a:lumMod val="60000"/>
-                        <a:lumOff val="40000"/>
-                      </a:schemeClr>
-                    </a:solidFill>
-                  </a:rPr>
-                  <a:t>BlueHoney</a:t>
-                </a:r>
-                <a:r>
-                  <a:rPr lang="en-US" dirty="0">
-                    <a:solidFill>
-                      <a:schemeClr val="accent6">
-                        <a:lumMod val="60000"/>
-                        <a:lumOff val="40000"/>
-                      </a:schemeClr>
-                    </a:solidFill>
-                  </a:rPr>
-                  <a:t> Academy's revenue comes from non-course sales.</a:t>
+                  <a:t>55% of BlueHoney Academy's revenue comes from non-course sales.</a:t>
                 </a:r>
               </a:p>
               <a:p>
@@ -10341,29 +10223,7 @@
                   </a:schemeClr>
                 </a:solidFill>
               </a:rPr>
-              <a:t>What percentage of </a:t>
-            </a:r>
-            <a:r>
-              <a:rPr lang="en-US" sz="2400" dirty="0" err="1">
-                <a:solidFill>
-                  <a:schemeClr val="accent6">
-                    <a:lumMod val="60000"/>
-                    <a:lumOff val="40000"/>
-                  </a:schemeClr>
-                </a:solidFill>
-              </a:rPr>
-              <a:t>BlueHoney</a:t>
-            </a:r>
-            <a:r>
-              <a:rPr lang="en-US" sz="2400" dirty="0">
-                <a:solidFill>
-                  <a:schemeClr val="accent6">
-                    <a:lumMod val="60000"/>
-                    <a:lumOff val="40000"/>
-                  </a:schemeClr>
-                </a:solidFill>
-              </a:rPr>
-              <a:t> Academy's revenue comes from non-course sales, and what does that imply about revenue diversification?</a:t>
+              <a:t>What percentage of BlueHoney Academy's revenue comes from non-course sales, and what does that imply about revenue diversification?</a:t>
             </a:r>
           </a:p>
         </p:txBody>
